--- a/STP/presentations/Sesssion_1/Introduction and agenda.pptx
+++ b/STP/presentations/Sesssion_1/Introduction and agenda.pptx
@@ -7815,26 +7815,6 @@
 </file>
 
 <file path=customXml/item1.xml><?xml version="1.0" encoding="utf-8"?>
-<?mso-contentType ?>
-<FormTemplates xmlns="http://schemas.microsoft.com/sharepoint/v3/contenttype/forms">
-  <Display>DocumentLibraryForm</Display>
-  <Edit>DocumentLibraryForm</Edit>
-  <New>DocumentLibraryForm</New>
-</FormTemplates>
-</file>
-
-<file path=customXml/item2.xml><?xml version="1.0" encoding="utf-8"?>
-<p:properties xmlns:p="http://schemas.microsoft.com/office/2006/metadata/properties" xmlns:xsi="http://www.w3.org/2001/XMLSchema-instance" xmlns:pc="http://schemas.microsoft.com/office/infopath/2007/PartnerControls">
-  <documentManagement>
-    <lcf76f155ced4ddcb4097134ff3c332f xmlns="c0caafef-fd22-48d0-85dc-526f5aa604f6">
-      <Terms xmlns="http://schemas.microsoft.com/office/infopath/2007/PartnerControls"/>
-    </lcf76f155ced4ddcb4097134ff3c332f>
-    <TaxCatchAll xmlns="cc7ce8ca-8f52-44ec-9496-3c41d0f5ad18" xsi:nil="true"/>
-  </documentManagement>
-</p:properties>
-</file>
-
-<file path=customXml/item3.xml><?xml version="1.0" encoding="utf-8"?>
 <ct:contentTypeSchema xmlns:ct="http://schemas.microsoft.com/office/2006/metadata/contentType" xmlns:ma="http://schemas.microsoft.com/office/2006/metadata/properties/metaAttributes" ct:_="" ma:_="" ma:contentTypeName="Document" ma:contentTypeID="0x01010072500CC7CC11694381E56D15BD009ABF" ma:contentTypeVersion="17" ma:contentTypeDescription="Create a new document." ma:contentTypeScope="" ma:versionID="5bde0183fae20f930619151b743545d5">
   <xsd:schema xmlns:xsd="http://www.w3.org/2001/XMLSchema" xmlns:xs="http://www.w3.org/2001/XMLSchema" xmlns:p="http://schemas.microsoft.com/office/2006/metadata/properties" xmlns:ns2="c0caafef-fd22-48d0-85dc-526f5aa604f6" xmlns:ns3="cc7ce8ca-8f52-44ec-9496-3c41d0f5ad18" targetNamespace="http://schemas.microsoft.com/office/2006/metadata/properties" ma:root="true" ma:fieldsID="b93acc077f3eeba91a697f445d89f976" ns2:_="" ns3:_="">
     <xsd:import namespace="c0caafef-fd22-48d0-85dc-526f5aa604f6"/>
@@ -8083,10 +8063,41 @@
 </ct:contentTypeSchema>
 </file>
 
+<file path=customXml/item2.xml><?xml version="1.0" encoding="utf-8"?>
+<p:properties xmlns:p="http://schemas.microsoft.com/office/2006/metadata/properties" xmlns:xsi="http://www.w3.org/2001/XMLSchema-instance" xmlns:pc="http://schemas.microsoft.com/office/infopath/2007/PartnerControls">
+  <documentManagement>
+    <lcf76f155ced4ddcb4097134ff3c332f xmlns="c0caafef-fd22-48d0-85dc-526f5aa604f6">
+      <Terms xmlns="http://schemas.microsoft.com/office/infopath/2007/PartnerControls"/>
+    </lcf76f155ced4ddcb4097134ff3c332f>
+    <TaxCatchAll xmlns="cc7ce8ca-8f52-44ec-9496-3c41d0f5ad18" xsi:nil="true"/>
+  </documentManagement>
+</p:properties>
+</file>
+
+<file path=customXml/item3.xml><?xml version="1.0" encoding="utf-8"?>
+<?mso-contentType ?>
+<FormTemplates xmlns="http://schemas.microsoft.com/sharepoint/v3/contenttype/forms">
+  <Display>DocumentLibraryForm</Display>
+  <Edit>DocumentLibraryForm</Edit>
+  <New>DocumentLibraryForm</New>
+</FormTemplates>
+</file>
+
 <file path=customXml/itemProps1.xml><?xml version="1.0" encoding="utf-8"?>
-<ds:datastoreItem xmlns:ds="http://schemas.openxmlformats.org/officeDocument/2006/customXml" ds:itemID="{3A3DF9AB-00FC-46DB-A5D6-293E8DE99346}">
+<ds:datastoreItem xmlns:ds="http://schemas.openxmlformats.org/officeDocument/2006/customXml" ds:itemID="{F8E82391-0565-41E9-9127-B1DFEFCF6557}">
   <ds:schemaRefs>
-    <ds:schemaRef ds:uri="http://schemas.microsoft.com/sharepoint/v3/contenttype/forms"/>
+    <ds:schemaRef ds:uri="http://schemas.microsoft.com/office/2006/metadata/contentType"/>
+    <ds:schemaRef ds:uri="http://schemas.microsoft.com/office/2006/metadata/properties/metaAttributes"/>
+    <ds:schemaRef ds:uri="http://www.w3.org/2001/XMLSchema"/>
+    <ds:schemaRef ds:uri="http://schemas.microsoft.com/office/2006/metadata/properties"/>
+    <ds:schemaRef ds:uri="c0caafef-fd22-48d0-85dc-526f5aa604f6"/>
+    <ds:schemaRef ds:uri="cc7ce8ca-8f52-44ec-9496-3c41d0f5ad18"/>
+    <ds:schemaRef ds:uri="http://schemas.microsoft.com/office/2006/documentManagement/types"/>
+    <ds:schemaRef ds:uri="http://schemas.microsoft.com/office/infopath/2007/PartnerControls"/>
+    <ds:schemaRef ds:uri="http://schemas.openxmlformats.org/package/2006/metadata/core-properties"/>
+    <ds:schemaRef ds:uri="http://purl.org/dc/elements/1.1/"/>
+    <ds:schemaRef ds:uri="http://purl.org/dc/terms/"/>
+    <ds:schemaRef ds:uri="http://schemas.microsoft.com/internal/obd"/>
   </ds:schemaRefs>
 </ds:datastoreItem>
 </file>
@@ -8103,20 +8114,9 @@
 </file>
 
 <file path=customXml/itemProps3.xml><?xml version="1.0" encoding="utf-8"?>
-<ds:datastoreItem xmlns:ds="http://schemas.openxmlformats.org/officeDocument/2006/customXml" ds:itemID="{F8E82391-0565-41E9-9127-B1DFEFCF6557}">
+<ds:datastoreItem xmlns:ds="http://schemas.openxmlformats.org/officeDocument/2006/customXml" ds:itemID="{3A3DF9AB-00FC-46DB-A5D6-293E8DE99346}">
   <ds:schemaRefs>
-    <ds:schemaRef ds:uri="http://schemas.microsoft.com/office/2006/metadata/contentType"/>
-    <ds:schemaRef ds:uri="http://schemas.microsoft.com/office/2006/metadata/properties/metaAttributes"/>
-    <ds:schemaRef ds:uri="http://www.w3.org/2001/XMLSchema"/>
-    <ds:schemaRef ds:uri="http://schemas.microsoft.com/office/2006/metadata/properties"/>
-    <ds:schemaRef ds:uri="c0caafef-fd22-48d0-85dc-526f5aa604f6"/>
-    <ds:schemaRef ds:uri="cc7ce8ca-8f52-44ec-9496-3c41d0f5ad18"/>
-    <ds:schemaRef ds:uri="http://schemas.microsoft.com/office/2006/documentManagement/types"/>
-    <ds:schemaRef ds:uri="http://schemas.microsoft.com/office/infopath/2007/PartnerControls"/>
-    <ds:schemaRef ds:uri="http://schemas.openxmlformats.org/package/2006/metadata/core-properties"/>
-    <ds:schemaRef ds:uri="http://purl.org/dc/elements/1.1/"/>
-    <ds:schemaRef ds:uri="http://purl.org/dc/terms/"/>
-    <ds:schemaRef ds:uri="http://schemas.microsoft.com/internal/obd"/>
+    <ds:schemaRef ds:uri="http://schemas.microsoft.com/sharepoint/v3/contenttype/forms"/>
   </ds:schemaRefs>
 </ds:datastoreItem>
 </file>
--- a/STP/presentations/Sesssion_1/Introduction and agenda.pptx
+++ b/STP/presentations/Sesssion_1/Introduction and agenda.pptx
@@ -733,7 +733,7 @@
           <a:p>
             <a:fld id="{F8A8B291-23C9-4CE5-96D0-E0118EB6230C}" type="datetimeFigureOut">
               <a:rPr lang="en-GB" smtClean="0"/>
-              <a:t>29/11/2025</a:t>
+              <a:t>30/11/2025</a:t>
             </a:fld>
             <a:endParaRPr lang="en-GB"/>
           </a:p>
@@ -933,7 +933,7 @@
           <a:p>
             <a:fld id="{F8A8B291-23C9-4CE5-96D0-E0118EB6230C}" type="datetimeFigureOut">
               <a:rPr lang="en-GB" smtClean="0"/>
-              <a:t>29/11/2025</a:t>
+              <a:t>30/11/2025</a:t>
             </a:fld>
             <a:endParaRPr lang="en-GB"/>
           </a:p>
@@ -1143,7 +1143,7 @@
           <a:p>
             <a:fld id="{F8A8B291-23C9-4CE5-96D0-E0118EB6230C}" type="datetimeFigureOut">
               <a:rPr lang="en-GB" smtClean="0"/>
-              <a:t>29/11/2025</a:t>
+              <a:t>30/11/2025</a:t>
             </a:fld>
             <a:endParaRPr lang="en-GB"/>
           </a:p>
@@ -1343,7 +1343,7 @@
           <a:p>
             <a:fld id="{F8A8B291-23C9-4CE5-96D0-E0118EB6230C}" type="datetimeFigureOut">
               <a:rPr lang="en-GB" smtClean="0"/>
-              <a:t>29/11/2025</a:t>
+              <a:t>30/11/2025</a:t>
             </a:fld>
             <a:endParaRPr lang="en-GB"/>
           </a:p>
@@ -1619,7 +1619,7 @@
           <a:p>
             <a:fld id="{F8A8B291-23C9-4CE5-96D0-E0118EB6230C}" type="datetimeFigureOut">
               <a:rPr lang="en-GB" smtClean="0"/>
-              <a:t>29/11/2025</a:t>
+              <a:t>30/11/2025</a:t>
             </a:fld>
             <a:endParaRPr lang="en-GB"/>
           </a:p>
@@ -1887,7 +1887,7 @@
           <a:p>
             <a:fld id="{F8A8B291-23C9-4CE5-96D0-E0118EB6230C}" type="datetimeFigureOut">
               <a:rPr lang="en-GB" smtClean="0"/>
-              <a:t>29/11/2025</a:t>
+              <a:t>30/11/2025</a:t>
             </a:fld>
             <a:endParaRPr lang="en-GB"/>
           </a:p>
@@ -2302,7 +2302,7 @@
           <a:p>
             <a:fld id="{F8A8B291-23C9-4CE5-96D0-E0118EB6230C}" type="datetimeFigureOut">
               <a:rPr lang="en-GB" smtClean="0"/>
-              <a:t>29/11/2025</a:t>
+              <a:t>30/11/2025</a:t>
             </a:fld>
             <a:endParaRPr lang="en-GB"/>
           </a:p>
@@ -2444,7 +2444,7 @@
           <a:p>
             <a:fld id="{F8A8B291-23C9-4CE5-96D0-E0118EB6230C}" type="datetimeFigureOut">
               <a:rPr lang="en-GB" smtClean="0"/>
-              <a:t>29/11/2025</a:t>
+              <a:t>30/11/2025</a:t>
             </a:fld>
             <a:endParaRPr lang="en-GB"/>
           </a:p>
@@ -2557,7 +2557,7 @@
           <a:p>
             <a:fld id="{F8A8B291-23C9-4CE5-96D0-E0118EB6230C}" type="datetimeFigureOut">
               <a:rPr lang="en-GB" smtClean="0"/>
-              <a:t>29/11/2025</a:t>
+              <a:t>30/11/2025</a:t>
             </a:fld>
             <a:endParaRPr lang="en-GB"/>
           </a:p>
@@ -2870,7 +2870,7 @@
           <a:p>
             <a:fld id="{F8A8B291-23C9-4CE5-96D0-E0118EB6230C}" type="datetimeFigureOut">
               <a:rPr lang="en-GB" smtClean="0"/>
-              <a:t>29/11/2025</a:t>
+              <a:t>30/11/2025</a:t>
             </a:fld>
             <a:endParaRPr lang="en-GB"/>
           </a:p>
@@ -3159,7 +3159,7 @@
           <a:p>
             <a:fld id="{F8A8B291-23C9-4CE5-96D0-E0118EB6230C}" type="datetimeFigureOut">
               <a:rPr lang="en-GB" smtClean="0"/>
-              <a:t>29/11/2025</a:t>
+              <a:t>30/11/2025</a:t>
             </a:fld>
             <a:endParaRPr lang="en-GB"/>
           </a:p>
@@ -3402,7 +3402,7 @@
           <a:p>
             <a:fld id="{F8A8B291-23C9-4CE5-96D0-E0118EB6230C}" type="datetimeFigureOut">
               <a:rPr lang="en-GB" smtClean="0"/>
-              <a:t>29/11/2025</a:t>
+              <a:t>30/11/2025</a:t>
             </a:fld>
             <a:endParaRPr lang="en-GB"/>
           </a:p>
@@ -6046,7 +6046,7 @@
         <p:spPr>
           <a:xfrm>
             <a:off x="423876" y="1485900"/>
-            <a:ext cx="11188700" cy="4488793"/>
+            <a:ext cx="11188700" cy="4858125"/>
           </a:xfrm>
           <a:prstGeom prst="rect">
             <a:avLst/>
@@ -6120,7 +6120,55 @@
             </a:r>
             <a:r>
               <a:rPr lang="en-GB" sz="1600" dirty="0"/>
-              <a:t> de Oxford e </a:t>
+              <a:t> de Oxford, </a:t>
+            </a:r>
+            <a:r>
+              <a:rPr lang="en-GB" sz="1600" dirty="0" err="1"/>
+              <a:t>onde</a:t>
+            </a:r>
+            <a:r>
+              <a:rPr lang="en-GB" sz="1600" dirty="0"/>
+              <a:t> se </a:t>
+            </a:r>
+            <a:r>
+              <a:rPr lang="en-GB" sz="1600" dirty="0" err="1"/>
+              <a:t>especializou</a:t>
+            </a:r>
+            <a:r>
+              <a:rPr lang="en-GB" sz="1600" dirty="0"/>
+              <a:t> </a:t>
+            </a:r>
+            <a:r>
+              <a:rPr lang="en-GB" sz="1600" dirty="0" err="1"/>
+              <a:t>em</a:t>
+            </a:r>
+            <a:r>
+              <a:rPr lang="en-GB" sz="1600" dirty="0"/>
+              <a:t> </a:t>
+            </a:r>
+            <a:r>
+              <a:rPr lang="en-GB" sz="1600" dirty="0" err="1"/>
+              <a:t>modelagem</a:t>
+            </a:r>
+            <a:r>
+              <a:rPr lang="en-GB" sz="1600" dirty="0"/>
+              <a:t> de </a:t>
+            </a:r>
+            <a:r>
+              <a:rPr lang="en-GB" sz="1600" dirty="0" err="1"/>
+              <a:t>ecossistemas</a:t>
+            </a:r>
+            <a:r>
+              <a:rPr lang="en-GB" sz="1600" dirty="0"/>
+              <a:t>, e </a:t>
+            </a:r>
+            <a:r>
+              <a:rPr lang="en-GB" sz="1600" dirty="0" err="1"/>
+              <a:t>é</a:t>
+            </a:r>
+            <a:r>
+              <a:rPr lang="en-GB" sz="1600" dirty="0"/>
+              <a:t> </a:t>
             </a:r>
             <a:r>
               <a:rPr lang="en-GB" sz="1600" dirty="0" err="1"/>
@@ -6588,6 +6636,70 @@
             <a:r>
               <a:rPr lang="en-GB" sz="1600" dirty="0" err="1"/>
               <a:t>Unido</a:t>
+            </a:r>
+            <a:r>
+              <a:rPr lang="en-GB" sz="1600" dirty="0"/>
+              <a:t>, </a:t>
+            </a:r>
+            <a:r>
+              <a:rPr lang="en-GB" sz="1600" dirty="0" err="1"/>
+              <a:t>onde</a:t>
+            </a:r>
+            <a:r>
+              <a:rPr lang="en-GB" sz="1600" dirty="0"/>
+              <a:t> se </a:t>
+            </a:r>
+            <a:r>
+              <a:rPr lang="en-GB" sz="1600" dirty="0" err="1"/>
+              <a:t>especializou</a:t>
+            </a:r>
+            <a:r>
+              <a:rPr lang="en-GB" sz="1600" dirty="0"/>
+              <a:t> </a:t>
+            </a:r>
+            <a:r>
+              <a:rPr lang="en-GB" sz="1600" dirty="0" err="1"/>
+              <a:t>em</a:t>
+            </a:r>
+            <a:r>
+              <a:rPr lang="en-GB" sz="1600" dirty="0"/>
+              <a:t> </a:t>
+            </a:r>
+            <a:r>
+              <a:rPr lang="en-GB" sz="1600" dirty="0" err="1"/>
+              <a:t>modelagem</a:t>
+            </a:r>
+            <a:r>
+              <a:rPr lang="en-GB" sz="1600" dirty="0"/>
+              <a:t> de </a:t>
+            </a:r>
+            <a:r>
+              <a:rPr lang="en-GB" sz="1600" dirty="0" err="1"/>
+              <a:t>estresse</a:t>
+            </a:r>
+            <a:r>
+              <a:rPr lang="en-GB" sz="1600" dirty="0"/>
+              <a:t> </a:t>
+            </a:r>
+            <a:r>
+              <a:rPr lang="en-GB" sz="1600" dirty="0" err="1"/>
+              <a:t>térmico</a:t>
+            </a:r>
+            <a:r>
+              <a:rPr lang="en-GB" sz="1600" dirty="0"/>
+              <a:t> </a:t>
+            </a:r>
+            <a:r>
+              <a:rPr lang="en-GB" sz="1600" dirty="0" err="1"/>
+              <a:t>em</a:t>
+            </a:r>
+            <a:r>
+              <a:rPr lang="en-GB" sz="1600" dirty="0"/>
+              <a:t> </a:t>
+            </a:r>
+            <a:r>
+              <a:rPr lang="en-GB" sz="1600" dirty="0" err="1"/>
+              <a:t>ecossistemas</a:t>
             </a:r>
             <a:r>
               <a:rPr lang="en-GB" sz="1600" dirty="0"/>
@@ -7815,6 +7927,26 @@
 </file>
 
 <file path=customXml/item1.xml><?xml version="1.0" encoding="utf-8"?>
+<?mso-contentType ?>
+<FormTemplates xmlns="http://schemas.microsoft.com/sharepoint/v3/contenttype/forms">
+  <Display>DocumentLibraryForm</Display>
+  <Edit>DocumentLibraryForm</Edit>
+  <New>DocumentLibraryForm</New>
+</FormTemplates>
+</file>
+
+<file path=customXml/item2.xml><?xml version="1.0" encoding="utf-8"?>
+<p:properties xmlns:p="http://schemas.microsoft.com/office/2006/metadata/properties" xmlns:xsi="http://www.w3.org/2001/XMLSchema-instance" xmlns:pc="http://schemas.microsoft.com/office/infopath/2007/PartnerControls">
+  <documentManagement>
+    <lcf76f155ced4ddcb4097134ff3c332f xmlns="c0caafef-fd22-48d0-85dc-526f5aa604f6">
+      <Terms xmlns="http://schemas.microsoft.com/office/infopath/2007/PartnerControls"/>
+    </lcf76f155ced4ddcb4097134ff3c332f>
+    <TaxCatchAll xmlns="cc7ce8ca-8f52-44ec-9496-3c41d0f5ad18" xsi:nil="true"/>
+  </documentManagement>
+</p:properties>
+</file>
+
+<file path=customXml/item3.xml><?xml version="1.0" encoding="utf-8"?>
 <ct:contentTypeSchema xmlns:ct="http://schemas.microsoft.com/office/2006/metadata/contentType" xmlns:ma="http://schemas.microsoft.com/office/2006/metadata/properties/metaAttributes" ct:_="" ma:_="" ma:contentTypeName="Document" ma:contentTypeID="0x01010072500CC7CC11694381E56D15BD009ABF" ma:contentTypeVersion="17" ma:contentTypeDescription="Create a new document." ma:contentTypeScope="" ma:versionID="5bde0183fae20f930619151b743545d5">
   <xsd:schema xmlns:xsd="http://www.w3.org/2001/XMLSchema" xmlns:xs="http://www.w3.org/2001/XMLSchema" xmlns:p="http://schemas.microsoft.com/office/2006/metadata/properties" xmlns:ns2="c0caafef-fd22-48d0-85dc-526f5aa604f6" xmlns:ns3="cc7ce8ca-8f52-44ec-9496-3c41d0f5ad18" targetNamespace="http://schemas.microsoft.com/office/2006/metadata/properties" ma:root="true" ma:fieldsID="b93acc077f3eeba91a697f445d89f976" ns2:_="" ns3:_="">
     <xsd:import namespace="c0caafef-fd22-48d0-85dc-526f5aa604f6"/>
@@ -8063,27 +8195,26 @@
 </ct:contentTypeSchema>
 </file>
 
-<file path=customXml/item2.xml><?xml version="1.0" encoding="utf-8"?>
-<p:properties xmlns:p="http://schemas.microsoft.com/office/2006/metadata/properties" xmlns:xsi="http://www.w3.org/2001/XMLSchema-instance" xmlns:pc="http://schemas.microsoft.com/office/infopath/2007/PartnerControls">
-  <documentManagement>
-    <lcf76f155ced4ddcb4097134ff3c332f xmlns="c0caafef-fd22-48d0-85dc-526f5aa604f6">
-      <Terms xmlns="http://schemas.microsoft.com/office/infopath/2007/PartnerControls"/>
-    </lcf76f155ced4ddcb4097134ff3c332f>
-    <TaxCatchAll xmlns="cc7ce8ca-8f52-44ec-9496-3c41d0f5ad18" xsi:nil="true"/>
-  </documentManagement>
-</p:properties>
+<file path=customXml/itemProps1.xml><?xml version="1.0" encoding="utf-8"?>
+<ds:datastoreItem xmlns:ds="http://schemas.openxmlformats.org/officeDocument/2006/customXml" ds:itemID="{3A3DF9AB-00FC-46DB-A5D6-293E8DE99346}">
+  <ds:schemaRefs>
+    <ds:schemaRef ds:uri="http://schemas.microsoft.com/sharepoint/v3/contenttype/forms"/>
+  </ds:schemaRefs>
+</ds:datastoreItem>
 </file>
 
-<file path=customXml/item3.xml><?xml version="1.0" encoding="utf-8"?>
-<?mso-contentType ?>
-<FormTemplates xmlns="http://schemas.microsoft.com/sharepoint/v3/contenttype/forms">
-  <Display>DocumentLibraryForm</Display>
-  <Edit>DocumentLibraryForm</Edit>
-  <New>DocumentLibraryForm</New>
-</FormTemplates>
+<file path=customXml/itemProps2.xml><?xml version="1.0" encoding="utf-8"?>
+<ds:datastoreItem xmlns:ds="http://schemas.openxmlformats.org/officeDocument/2006/customXml" ds:itemID="{E17CF73B-06D3-4F9B-955D-0740B08863BD}">
+  <ds:schemaRefs>
+    <ds:schemaRef ds:uri="http://schemas.microsoft.com/office/2006/metadata/properties"/>
+    <ds:schemaRef ds:uri="http://schemas.microsoft.com/office/infopath/2007/PartnerControls"/>
+    <ds:schemaRef ds:uri="c0caafef-fd22-48d0-85dc-526f5aa604f6"/>
+    <ds:schemaRef ds:uri="cc7ce8ca-8f52-44ec-9496-3c41d0f5ad18"/>
+  </ds:schemaRefs>
+</ds:datastoreItem>
 </file>
 
-<file path=customXml/itemProps1.xml><?xml version="1.0" encoding="utf-8"?>
+<file path=customXml/itemProps3.xml><?xml version="1.0" encoding="utf-8"?>
 <ds:datastoreItem xmlns:ds="http://schemas.openxmlformats.org/officeDocument/2006/customXml" ds:itemID="{F8E82391-0565-41E9-9127-B1DFEFCF6557}">
   <ds:schemaRefs>
     <ds:schemaRef ds:uri="http://schemas.microsoft.com/office/2006/metadata/contentType"/>
@@ -8100,23 +8231,4 @@
     <ds:schemaRef ds:uri="http://schemas.microsoft.com/internal/obd"/>
   </ds:schemaRefs>
 </ds:datastoreItem>
-</file>
-
-<file path=customXml/itemProps2.xml><?xml version="1.0" encoding="utf-8"?>
-<ds:datastoreItem xmlns:ds="http://schemas.openxmlformats.org/officeDocument/2006/customXml" ds:itemID="{E17CF73B-06D3-4F9B-955D-0740B08863BD}">
-  <ds:schemaRefs>
-    <ds:schemaRef ds:uri="http://schemas.microsoft.com/office/2006/metadata/properties"/>
-    <ds:schemaRef ds:uri="http://schemas.microsoft.com/office/infopath/2007/PartnerControls"/>
-    <ds:schemaRef ds:uri="c0caafef-fd22-48d0-85dc-526f5aa604f6"/>
-    <ds:schemaRef ds:uri="cc7ce8ca-8f52-44ec-9496-3c41d0f5ad18"/>
-  </ds:schemaRefs>
-</ds:datastoreItem>
-</file>
-
-<file path=customXml/itemProps3.xml><?xml version="1.0" encoding="utf-8"?>
-<ds:datastoreItem xmlns:ds="http://schemas.openxmlformats.org/officeDocument/2006/customXml" ds:itemID="{3A3DF9AB-00FC-46DB-A5D6-293E8DE99346}">
-  <ds:schemaRefs>
-    <ds:schemaRef ds:uri="http://schemas.microsoft.com/sharepoint/v3/contenttype/forms"/>
-  </ds:schemaRefs>
-</ds:datastoreItem>
 </file>
--- a/STP/presentations/Sesssion_1/Introduction and agenda.pptx
+++ b/STP/presentations/Sesssion_1/Introduction and agenda.pptx
@@ -5,12 +5,13 @@
     <p:sldMasterId id="2147483648" r:id="rId4"/>
   </p:sldMasterIdLst>
   <p:sldIdLst>
-    <p:sldId id="278" r:id="rId5"/>
-    <p:sldId id="261" r:id="rId6"/>
-    <p:sldId id="287" r:id="rId7"/>
-    <p:sldId id="279" r:id="rId8"/>
-    <p:sldId id="288" r:id="rId9"/>
-    <p:sldId id="289" r:id="rId10"/>
+    <p:sldId id="290" r:id="rId5"/>
+    <p:sldId id="278" r:id="rId6"/>
+    <p:sldId id="261" r:id="rId7"/>
+    <p:sldId id="287" r:id="rId8"/>
+    <p:sldId id="279" r:id="rId9"/>
+    <p:sldId id="288" r:id="rId10"/>
+    <p:sldId id="289" r:id="rId11"/>
   </p:sldIdLst>
   <p:sldSz cx="12192000" cy="6858000"/>
   <p:notesSz cx="6858000" cy="9144000"/>
@@ -733,7 +734,7 @@
           <a:p>
             <a:fld id="{F8A8B291-23C9-4CE5-96D0-E0118EB6230C}" type="datetimeFigureOut">
               <a:rPr lang="en-GB" smtClean="0"/>
-              <a:t>30/11/2025</a:t>
+              <a:t>01/12/2025</a:t>
             </a:fld>
             <a:endParaRPr lang="en-GB"/>
           </a:p>
@@ -933,7 +934,7 @@
           <a:p>
             <a:fld id="{F8A8B291-23C9-4CE5-96D0-E0118EB6230C}" type="datetimeFigureOut">
               <a:rPr lang="en-GB" smtClean="0"/>
-              <a:t>30/11/2025</a:t>
+              <a:t>01/12/2025</a:t>
             </a:fld>
             <a:endParaRPr lang="en-GB"/>
           </a:p>
@@ -1143,7 +1144,7 @@
           <a:p>
             <a:fld id="{F8A8B291-23C9-4CE5-96D0-E0118EB6230C}" type="datetimeFigureOut">
               <a:rPr lang="en-GB" smtClean="0"/>
-              <a:t>30/11/2025</a:t>
+              <a:t>01/12/2025</a:t>
             </a:fld>
             <a:endParaRPr lang="en-GB"/>
           </a:p>
@@ -1343,7 +1344,7 @@
           <a:p>
             <a:fld id="{F8A8B291-23C9-4CE5-96D0-E0118EB6230C}" type="datetimeFigureOut">
               <a:rPr lang="en-GB" smtClean="0"/>
-              <a:t>30/11/2025</a:t>
+              <a:t>01/12/2025</a:t>
             </a:fld>
             <a:endParaRPr lang="en-GB"/>
           </a:p>
@@ -1619,7 +1620,7 @@
           <a:p>
             <a:fld id="{F8A8B291-23C9-4CE5-96D0-E0118EB6230C}" type="datetimeFigureOut">
               <a:rPr lang="en-GB" smtClean="0"/>
-              <a:t>30/11/2025</a:t>
+              <a:t>01/12/2025</a:t>
             </a:fld>
             <a:endParaRPr lang="en-GB"/>
           </a:p>
@@ -1887,7 +1888,7 @@
           <a:p>
             <a:fld id="{F8A8B291-23C9-4CE5-96D0-E0118EB6230C}" type="datetimeFigureOut">
               <a:rPr lang="en-GB" smtClean="0"/>
-              <a:t>30/11/2025</a:t>
+              <a:t>01/12/2025</a:t>
             </a:fld>
             <a:endParaRPr lang="en-GB"/>
           </a:p>
@@ -2302,7 +2303,7 @@
           <a:p>
             <a:fld id="{F8A8B291-23C9-4CE5-96D0-E0118EB6230C}" type="datetimeFigureOut">
               <a:rPr lang="en-GB" smtClean="0"/>
-              <a:t>30/11/2025</a:t>
+              <a:t>01/12/2025</a:t>
             </a:fld>
             <a:endParaRPr lang="en-GB"/>
           </a:p>
@@ -2444,7 +2445,7 @@
           <a:p>
             <a:fld id="{F8A8B291-23C9-4CE5-96D0-E0118EB6230C}" type="datetimeFigureOut">
               <a:rPr lang="en-GB" smtClean="0"/>
-              <a:t>30/11/2025</a:t>
+              <a:t>01/12/2025</a:t>
             </a:fld>
             <a:endParaRPr lang="en-GB"/>
           </a:p>
@@ -2557,7 +2558,7 @@
           <a:p>
             <a:fld id="{F8A8B291-23C9-4CE5-96D0-E0118EB6230C}" type="datetimeFigureOut">
               <a:rPr lang="en-GB" smtClean="0"/>
-              <a:t>30/11/2025</a:t>
+              <a:t>01/12/2025</a:t>
             </a:fld>
             <a:endParaRPr lang="en-GB"/>
           </a:p>
@@ -2870,7 +2871,7 @@
           <a:p>
             <a:fld id="{F8A8B291-23C9-4CE5-96D0-E0118EB6230C}" type="datetimeFigureOut">
               <a:rPr lang="en-GB" smtClean="0"/>
-              <a:t>30/11/2025</a:t>
+              <a:t>01/12/2025</a:t>
             </a:fld>
             <a:endParaRPr lang="en-GB"/>
           </a:p>
@@ -3159,7 +3160,7 @@
           <a:p>
             <a:fld id="{F8A8B291-23C9-4CE5-96D0-E0118EB6230C}" type="datetimeFigureOut">
               <a:rPr lang="en-GB" smtClean="0"/>
-              <a:t>30/11/2025</a:t>
+              <a:t>01/12/2025</a:t>
             </a:fld>
             <a:endParaRPr lang="en-GB"/>
           </a:p>
@@ -3402,7 +3403,7 @@
           <a:p>
             <a:fld id="{F8A8B291-23C9-4CE5-96D0-E0118EB6230C}" type="datetimeFigureOut">
               <a:rPr lang="en-GB" smtClean="0"/>
-              <a:t>30/11/2025</a:t>
+              <a:t>01/12/2025</a:t>
             </a:fld>
             <a:endParaRPr lang="en-GB"/>
           </a:p>
@@ -3807,6 +3808,594 @@
   <p:cSld>
     <p:spTree>
       <p:nvGrpSpPr>
+        <p:cNvPr id="1" name="">
+          <a:extLst>
+            <a:ext uri="{FF2B5EF4-FFF2-40B4-BE49-F238E27FC236}">
+              <a16:creationId xmlns:a16="http://schemas.microsoft.com/office/drawing/2014/main" id="{65BC9840-EC1B-981D-BCDA-371108F60A3E}"/>
+            </a:ext>
+          </a:extLst>
+        </p:cNvPr>
+        <p:cNvGrpSpPr/>
+        <p:nvPr/>
+      </p:nvGrpSpPr>
+      <p:grpSpPr>
+        <a:xfrm>
+          <a:off x="0" y="0"/>
+          <a:ext cx="0" cy="0"/>
+          <a:chOff x="0" y="0"/>
+          <a:chExt cx="0" cy="0"/>
+        </a:xfrm>
+      </p:grpSpPr>
+      <p:sp>
+        <p:nvSpPr>
+          <p:cNvPr id="2" name="Title 1">
+            <a:extLst>
+              <a:ext uri="{FF2B5EF4-FFF2-40B4-BE49-F238E27FC236}">
+                <a16:creationId xmlns:a16="http://schemas.microsoft.com/office/drawing/2014/main" id="{8E33E14B-F730-3BE5-55EB-EB955E766515}"/>
+              </a:ext>
+            </a:extLst>
+          </p:cNvPr>
+          <p:cNvSpPr>
+            <a:spLocks noGrp="1"/>
+          </p:cNvSpPr>
+          <p:nvPr>
+            <p:ph type="ctrTitle"/>
+          </p:nvPr>
+        </p:nvSpPr>
+        <p:spPr>
+          <a:xfrm>
+            <a:off x="1523999" y="2985214"/>
+            <a:ext cx="9144000" cy="1655762"/>
+          </a:xfrm>
+        </p:spPr>
+        <p:txBody>
+          <a:bodyPr>
+            <a:normAutofit fontScale="90000"/>
+          </a:bodyPr>
+          <a:lstStyle/>
+          <a:p>
+            <a:pPr>
+              <a:lnSpc>
+                <a:spcPct val="150000"/>
+              </a:lnSpc>
+            </a:pPr>
+            <a:r>
+              <a:rPr lang="en-US" sz="2400" dirty="0" err="1">
+                <a:solidFill>
+                  <a:srgbClr val="0070C0"/>
+                </a:solidFill>
+                <a:latin typeface="Arial"/>
+                <a:cs typeface="Arial"/>
+              </a:rPr>
+              <a:t>Ateliê</a:t>
+            </a:r>
+            <a:r>
+              <a:rPr lang="en-US" sz="2400" dirty="0">
+                <a:solidFill>
+                  <a:srgbClr val="0070C0"/>
+                </a:solidFill>
+                <a:latin typeface="Arial"/>
+                <a:cs typeface="Arial"/>
+              </a:rPr>
+              <a:t> de </a:t>
+            </a:r>
+            <a:r>
+              <a:rPr lang="en-US" sz="2400" dirty="0" err="1">
+                <a:solidFill>
+                  <a:srgbClr val="0070C0"/>
+                </a:solidFill>
+                <a:latin typeface="Arial"/>
+                <a:cs typeface="Arial"/>
+              </a:rPr>
+              <a:t>apresentação</a:t>
+            </a:r>
+            <a:r>
+              <a:rPr lang="en-US" sz="2400" dirty="0">
+                <a:solidFill>
+                  <a:srgbClr val="0070C0"/>
+                </a:solidFill>
+                <a:latin typeface="Arial"/>
+                <a:cs typeface="Arial"/>
+              </a:rPr>
+              <a:t> dos </a:t>
+            </a:r>
+            <a:r>
+              <a:rPr lang="en-US" sz="2400" dirty="0" err="1">
+                <a:solidFill>
+                  <a:srgbClr val="0070C0"/>
+                </a:solidFill>
+                <a:latin typeface="Arial"/>
+                <a:cs typeface="Arial"/>
+              </a:rPr>
+              <a:t>resultados</a:t>
+            </a:r>
+            <a:r>
+              <a:rPr lang="en-US" sz="2400" dirty="0">
+                <a:solidFill>
+                  <a:srgbClr val="0070C0"/>
+                </a:solidFill>
+                <a:latin typeface="Arial"/>
+                <a:cs typeface="Arial"/>
+              </a:rPr>
+              <a:t> do </a:t>
+            </a:r>
+            <a:r>
+              <a:rPr lang="en-US" sz="2400" dirty="0" err="1">
+                <a:solidFill>
+                  <a:srgbClr val="0070C0"/>
+                </a:solidFill>
+                <a:latin typeface="Arial"/>
+                <a:cs typeface="Arial"/>
+              </a:rPr>
+              <a:t>estudo</a:t>
+            </a:r>
+            <a:r>
+              <a:rPr lang="en-US" sz="2400" dirty="0">
+                <a:solidFill>
+                  <a:srgbClr val="0070C0"/>
+                </a:solidFill>
+                <a:latin typeface="Arial"/>
+                <a:cs typeface="Arial"/>
+              </a:rPr>
+              <a:t> de </a:t>
+            </a:r>
+            <a:r>
+              <a:rPr lang="en-US" sz="2400" dirty="0" err="1">
+                <a:solidFill>
+                  <a:srgbClr val="0070C0"/>
+                </a:solidFill>
+                <a:latin typeface="Arial"/>
+                <a:cs typeface="Arial"/>
+              </a:rPr>
+              <a:t>impacto</a:t>
+            </a:r>
+            <a:r>
+              <a:rPr lang="en-US" sz="2400" dirty="0">
+                <a:solidFill>
+                  <a:srgbClr val="0070C0"/>
+                </a:solidFill>
+                <a:latin typeface="Arial"/>
+                <a:cs typeface="Arial"/>
+              </a:rPr>
+              <a:t> das </a:t>
+            </a:r>
+            <a:r>
+              <a:rPr lang="en-US" sz="2400" dirty="0" err="1">
+                <a:solidFill>
+                  <a:srgbClr val="0070C0"/>
+                </a:solidFill>
+                <a:latin typeface="Arial"/>
+                <a:cs typeface="Arial"/>
+              </a:rPr>
+              <a:t>mudanças</a:t>
+            </a:r>
+            <a:r>
+              <a:rPr lang="en-US" sz="2400" dirty="0">
+                <a:solidFill>
+                  <a:srgbClr val="0070C0"/>
+                </a:solidFill>
+                <a:latin typeface="Arial"/>
+                <a:cs typeface="Arial"/>
+              </a:rPr>
+              <a:t> </a:t>
+            </a:r>
+            <a:r>
+              <a:rPr lang="en-US" sz="2400" dirty="0" err="1">
+                <a:solidFill>
+                  <a:srgbClr val="0070C0"/>
+                </a:solidFill>
+                <a:latin typeface="Arial"/>
+                <a:cs typeface="Arial"/>
+              </a:rPr>
+              <a:t>climáticas</a:t>
+            </a:r>
+            <a:r>
+              <a:rPr lang="en-US" sz="2400" dirty="0">
+                <a:solidFill>
+                  <a:srgbClr val="0070C0"/>
+                </a:solidFill>
+                <a:latin typeface="Arial"/>
+                <a:cs typeface="Arial"/>
+              </a:rPr>
+              <a:t> </a:t>
+            </a:r>
+            <a:r>
+              <a:rPr lang="en-US" sz="2400" dirty="0" err="1">
+                <a:solidFill>
+                  <a:srgbClr val="0070C0"/>
+                </a:solidFill>
+                <a:latin typeface="Arial"/>
+                <a:cs typeface="Arial"/>
+              </a:rPr>
+              <a:t>sobre</a:t>
+            </a:r>
+            <a:r>
+              <a:rPr lang="en-US" sz="2400" dirty="0">
+                <a:solidFill>
+                  <a:srgbClr val="0070C0"/>
+                </a:solidFill>
+                <a:latin typeface="Arial"/>
+                <a:cs typeface="Arial"/>
+              </a:rPr>
+              <a:t> a </a:t>
+            </a:r>
+            <a:r>
+              <a:rPr lang="en-US" sz="2400" dirty="0" err="1">
+                <a:solidFill>
+                  <a:srgbClr val="0070C0"/>
+                </a:solidFill>
+                <a:latin typeface="Arial"/>
+                <a:cs typeface="Arial"/>
+              </a:rPr>
+              <a:t>pesca</a:t>
+            </a:r>
+            <a:r>
+              <a:rPr lang="en-US" sz="2400" dirty="0">
+                <a:solidFill>
+                  <a:srgbClr val="0070C0"/>
+                </a:solidFill>
+                <a:latin typeface="Arial"/>
+                <a:cs typeface="Arial"/>
+              </a:rPr>
+              <a:t> e o turismo </a:t>
+            </a:r>
+            <a:r>
+              <a:rPr lang="en-US" sz="2400" dirty="0" err="1">
+                <a:solidFill>
+                  <a:srgbClr val="0070C0"/>
+                </a:solidFill>
+                <a:latin typeface="Arial"/>
+                <a:cs typeface="Arial"/>
+              </a:rPr>
+              <a:t>em</a:t>
+            </a:r>
+            <a:r>
+              <a:rPr lang="en-US" sz="2400" dirty="0">
+                <a:solidFill>
+                  <a:srgbClr val="0070C0"/>
+                </a:solidFill>
+                <a:latin typeface="Arial"/>
+                <a:cs typeface="Arial"/>
+              </a:rPr>
+              <a:t> São Tomé e Príncipe</a:t>
+            </a:r>
+            <a:br>
+              <a:rPr lang="en-US" sz="1800" dirty="0">
+                <a:solidFill>
+                  <a:srgbClr val="0070C0"/>
+                </a:solidFill>
+                <a:latin typeface="Arial"/>
+                <a:cs typeface="Arial"/>
+              </a:rPr>
+            </a:br>
+            <a:r>
+              <a:rPr lang="en-US" sz="1800" dirty="0">
+                <a:solidFill>
+                  <a:srgbClr val="0070C0"/>
+                </a:solidFill>
+                <a:latin typeface="Arial"/>
+                <a:cs typeface="Arial"/>
+              </a:rPr>
+              <a:t> November/December 2025</a:t>
+            </a:r>
+            <a:endParaRPr lang="en-US" sz="3600" dirty="0">
+              <a:solidFill>
+                <a:srgbClr val="0070C0"/>
+              </a:solidFill>
+              <a:latin typeface="Arial"/>
+              <a:cs typeface="Arial"/>
+            </a:endParaRPr>
+          </a:p>
+        </p:txBody>
+      </p:sp>
+      <p:pic>
+        <p:nvPicPr>
+          <p:cNvPr id="7" name="Picture 6" descr="Graphical user interface, text&#10;&#10;Description automatically generated">
+            <a:extLst>
+              <a:ext uri="{FF2B5EF4-FFF2-40B4-BE49-F238E27FC236}">
+                <a16:creationId xmlns:a16="http://schemas.microsoft.com/office/drawing/2014/main" id="{47D38F40-5A3D-C1AD-5AA3-7F688218CD58}"/>
+              </a:ext>
+            </a:extLst>
+          </p:cNvPr>
+          <p:cNvPicPr>
+            <a:picLocks noChangeAspect="1"/>
+          </p:cNvPicPr>
+          <p:nvPr/>
+        </p:nvPicPr>
+        <p:blipFill>
+          <a:blip r:embed="rId2"/>
+          <a:srcRect r="31257"/>
+          <a:stretch>
+            <a:fillRect/>
+          </a:stretch>
+        </p:blipFill>
+        <p:spPr>
+          <a:xfrm>
+            <a:off x="594821" y="257459"/>
+            <a:ext cx="3014653" cy="1003438"/>
+          </a:xfrm>
+          <a:prstGeom prst="rect">
+            <a:avLst/>
+          </a:prstGeom>
+        </p:spPr>
+      </p:pic>
+      <p:cxnSp>
+        <p:nvCxnSpPr>
+          <p:cNvPr id="10" name="Straight Connector 9">
+            <a:extLst>
+              <a:ext uri="{FF2B5EF4-FFF2-40B4-BE49-F238E27FC236}">
+                <a16:creationId xmlns:a16="http://schemas.microsoft.com/office/drawing/2014/main" id="{6DF6DC72-503D-0E2F-AB9D-6F66AD1593B0}"/>
+              </a:ext>
+            </a:extLst>
+          </p:cNvPr>
+          <p:cNvCxnSpPr/>
+          <p:nvPr/>
+        </p:nvCxnSpPr>
+        <p:spPr>
+          <a:xfrm>
+            <a:off x="968828" y="4860221"/>
+            <a:ext cx="10254343" cy="0"/>
+          </a:xfrm>
+          <a:prstGeom prst="line">
+            <a:avLst/>
+          </a:prstGeom>
+        </p:spPr>
+        <p:style>
+          <a:lnRef idx="1">
+            <a:schemeClr val="accent1"/>
+          </a:lnRef>
+          <a:fillRef idx="0">
+            <a:schemeClr val="accent1"/>
+          </a:fillRef>
+          <a:effectRef idx="0">
+            <a:schemeClr val="accent1"/>
+          </a:effectRef>
+          <a:fontRef idx="minor">
+            <a:schemeClr val="tx1"/>
+          </a:fontRef>
+        </p:style>
+      </p:cxnSp>
+      <p:grpSp>
+        <p:nvGrpSpPr>
+          <p:cNvPr id="14" name="Group 13">
+            <a:extLst>
+              <a:ext uri="{FF2B5EF4-FFF2-40B4-BE49-F238E27FC236}">
+                <a16:creationId xmlns:a16="http://schemas.microsoft.com/office/drawing/2014/main" id="{08205218-0BFA-92ED-5927-878A9B4F8EE3}"/>
+              </a:ext>
+            </a:extLst>
+          </p:cNvPr>
+          <p:cNvGrpSpPr/>
+          <p:nvPr/>
+        </p:nvGrpSpPr>
+        <p:grpSpPr>
+          <a:xfrm>
+            <a:off x="-16329" y="1390670"/>
+            <a:ext cx="12208329" cy="262452"/>
+            <a:chOff x="-16329" y="6677194"/>
+            <a:chExt cx="12208329" cy="262452"/>
+          </a:xfrm>
+        </p:grpSpPr>
+        <p:sp>
+          <p:nvSpPr>
+            <p:cNvPr id="12" name="Rectangle 11">
+              <a:extLst>
+                <a:ext uri="{FF2B5EF4-FFF2-40B4-BE49-F238E27FC236}">
+                  <a16:creationId xmlns:a16="http://schemas.microsoft.com/office/drawing/2014/main" id="{026E643E-5076-71CA-32CF-E08A9690A93D}"/>
+                </a:ext>
+              </a:extLst>
+            </p:cNvPr>
+            <p:cNvSpPr/>
+            <p:nvPr/>
+          </p:nvSpPr>
+          <p:spPr>
+            <a:xfrm>
+              <a:off x="6384471" y="6678386"/>
+              <a:ext cx="3804558" cy="261259"/>
+            </a:xfrm>
+            <a:prstGeom prst="rect">
+              <a:avLst/>
+            </a:prstGeom>
+            <a:ln>
+              <a:noFill/>
+            </a:ln>
+          </p:spPr>
+          <p:style>
+            <a:lnRef idx="2">
+              <a:schemeClr val="accent1">
+                <a:shade val="50000"/>
+              </a:schemeClr>
+            </a:lnRef>
+            <a:fillRef idx="1">
+              <a:schemeClr val="accent1"/>
+            </a:fillRef>
+            <a:effectRef idx="0">
+              <a:schemeClr val="accent1"/>
+            </a:effectRef>
+            <a:fontRef idx="minor">
+              <a:schemeClr val="lt1"/>
+            </a:fontRef>
+          </p:style>
+          <p:txBody>
+            <a:bodyPr rtlCol="0" anchor="ctr"/>
+            <a:lstStyle/>
+            <a:p>
+              <a:pPr algn="ctr"/>
+              <a:endParaRPr lang="en-US"/>
+            </a:p>
+          </p:txBody>
+        </p:sp>
+        <p:sp>
+          <p:nvSpPr>
+            <p:cNvPr id="11" name="Rectangle 10">
+              <a:extLst>
+                <a:ext uri="{FF2B5EF4-FFF2-40B4-BE49-F238E27FC236}">
+                  <a16:creationId xmlns:a16="http://schemas.microsoft.com/office/drawing/2014/main" id="{EB688189-07B6-56D3-4B63-EF770EEC50CD}"/>
+                </a:ext>
+              </a:extLst>
+            </p:cNvPr>
+            <p:cNvSpPr/>
+            <p:nvPr/>
+          </p:nvSpPr>
+          <p:spPr>
+            <a:xfrm>
+              <a:off x="-16329" y="6678388"/>
+              <a:ext cx="6400800" cy="261258"/>
+            </a:xfrm>
+            <a:prstGeom prst="rect">
+              <a:avLst/>
+            </a:prstGeom>
+            <a:solidFill>
+              <a:schemeClr val="accent5">
+                <a:lumMod val="50000"/>
+              </a:schemeClr>
+            </a:solidFill>
+            <a:ln>
+              <a:noFill/>
+            </a:ln>
+          </p:spPr>
+          <p:style>
+            <a:lnRef idx="2">
+              <a:schemeClr val="accent1">
+                <a:shade val="50000"/>
+              </a:schemeClr>
+            </a:lnRef>
+            <a:fillRef idx="1">
+              <a:schemeClr val="accent1"/>
+            </a:fillRef>
+            <a:effectRef idx="0">
+              <a:schemeClr val="accent1"/>
+            </a:effectRef>
+            <a:fontRef idx="minor">
+              <a:schemeClr val="lt1"/>
+            </a:fontRef>
+          </p:style>
+          <p:txBody>
+            <a:bodyPr rtlCol="0" anchor="ctr"/>
+            <a:lstStyle/>
+            <a:p>
+              <a:pPr algn="ctr"/>
+              <a:endParaRPr lang="en-US"/>
+            </a:p>
+          </p:txBody>
+        </p:sp>
+        <p:sp>
+          <p:nvSpPr>
+            <p:cNvPr id="13" name="Rectangle 12">
+              <a:extLst>
+                <a:ext uri="{FF2B5EF4-FFF2-40B4-BE49-F238E27FC236}">
+                  <a16:creationId xmlns:a16="http://schemas.microsoft.com/office/drawing/2014/main" id="{5DD44E79-AB91-CEDC-EEF2-F59085EF54C6}"/>
+                </a:ext>
+              </a:extLst>
+            </p:cNvPr>
+            <p:cNvSpPr/>
+            <p:nvPr/>
+          </p:nvSpPr>
+          <p:spPr>
+            <a:xfrm>
+              <a:off x="10189029" y="6677194"/>
+              <a:ext cx="2002971" cy="262451"/>
+            </a:xfrm>
+            <a:prstGeom prst="rect">
+              <a:avLst/>
+            </a:prstGeom>
+            <a:solidFill>
+              <a:schemeClr val="accent4"/>
+            </a:solidFill>
+            <a:ln>
+              <a:noFill/>
+            </a:ln>
+          </p:spPr>
+          <p:style>
+            <a:lnRef idx="2">
+              <a:schemeClr val="accent1">
+                <a:shade val="50000"/>
+              </a:schemeClr>
+            </a:lnRef>
+            <a:fillRef idx="1">
+              <a:schemeClr val="accent1"/>
+            </a:fillRef>
+            <a:effectRef idx="0">
+              <a:schemeClr val="accent1"/>
+            </a:effectRef>
+            <a:fontRef idx="minor">
+              <a:schemeClr val="lt1"/>
+            </a:fontRef>
+          </p:style>
+          <p:txBody>
+            <a:bodyPr rtlCol="0" anchor="ctr"/>
+            <a:lstStyle/>
+            <a:p>
+              <a:pPr algn="ctr"/>
+              <a:endParaRPr lang="en-US"/>
+            </a:p>
+          </p:txBody>
+        </p:sp>
+      </p:grpSp>
+      <p:pic>
+        <p:nvPicPr>
+          <p:cNvPr id="3074" name="Picture 2">
+            <a:extLst>
+              <a:ext uri="{FF2B5EF4-FFF2-40B4-BE49-F238E27FC236}">
+                <a16:creationId xmlns:a16="http://schemas.microsoft.com/office/drawing/2014/main" id="{C77B93BF-04E8-5EE9-BF81-A8CE9E220403}"/>
+              </a:ext>
+            </a:extLst>
+          </p:cNvPr>
+          <p:cNvPicPr>
+            <a:picLocks noChangeAspect="1" noChangeArrowheads="1"/>
+          </p:cNvPicPr>
+          <p:nvPr/>
+        </p:nvPicPr>
+        <p:blipFill>
+          <a:blip r:embed="rId3">
+            <a:extLst>
+              <a:ext uri="{28A0092B-C50C-407E-A947-70E740481C1C}">
+                <a14:useLocalDpi xmlns:a14="http://schemas.microsoft.com/office/drawing/2010/main" val="0"/>
+              </a:ext>
+            </a:extLst>
+          </a:blip>
+          <a:srcRect/>
+          <a:stretch>
+            <a:fillRect/>
+          </a:stretch>
+        </p:blipFill>
+        <p:spPr bwMode="auto">
+          <a:xfrm>
+            <a:off x="9102166" y="174034"/>
+            <a:ext cx="2173726" cy="1086863"/>
+          </a:xfrm>
+          <a:prstGeom prst="rect">
+            <a:avLst/>
+          </a:prstGeom>
+          <a:noFill/>
+          <a:extLst>
+            <a:ext uri="{909E8E84-426E-40DD-AFC4-6F175D3DCCD1}">
+              <a14:hiddenFill xmlns:a14="http://schemas.microsoft.com/office/drawing/2010/main">
+                <a:solidFill>
+                  <a:srgbClr val="FFFFFF"/>
+                </a:solidFill>
+              </a14:hiddenFill>
+            </a:ext>
+          </a:extLst>
+        </p:spPr>
+      </p:pic>
+    </p:spTree>
+    <p:extLst>
+      <p:ext uri="{BB962C8B-B14F-4D97-AF65-F5344CB8AC3E}">
+        <p14:creationId xmlns:p14="http://schemas.microsoft.com/office/powerpoint/2010/main" val="3044768873"/>
+      </p:ext>
+    </p:extLst>
+  </p:cSld>
+  <p:clrMapOvr>
+    <a:masterClrMapping/>
+  </p:clrMapOvr>
+</p:sld>
+</file>
+
+<file path=ppt/slides/slide2.xml><?xml version="1.0" encoding="utf-8"?>
+<p:sld xmlns:a="http://schemas.openxmlformats.org/drawingml/2006/main" xmlns:r="http://schemas.openxmlformats.org/officeDocument/2006/relationships" xmlns:p="http://schemas.openxmlformats.org/presentationml/2006/main">
+  <p:cSld>
+    <p:spTree>
+      <p:nvGrpSpPr>
         <p:cNvPr id="1" name=""/>
         <p:cNvGrpSpPr/>
         <p:nvPr/>
@@ -4379,7 +4968,7 @@
 </p:sld>
 </file>
 
-<file path=ppt/slides/slide2.xml><?xml version="1.0" encoding="utf-8"?>
+<file path=ppt/slides/slide3.xml><?xml version="1.0" encoding="utf-8"?>
 <p:sld xmlns:a="http://schemas.openxmlformats.org/drawingml/2006/main" xmlns:r="http://schemas.openxmlformats.org/officeDocument/2006/relationships" xmlns:p="http://schemas.openxmlformats.org/presentationml/2006/main">
   <p:cSld>
     <p:spTree>
@@ -5170,7 +5759,7 @@
 </p:sld>
 </file>
 
-<file path=ppt/slides/slide3.xml><?xml version="1.0" encoding="utf-8"?>
+<file path=ppt/slides/slide4.xml><?xml version="1.0" encoding="utf-8"?>
 <p:sld xmlns:a="http://schemas.openxmlformats.org/drawingml/2006/main" xmlns:r="http://schemas.openxmlformats.org/officeDocument/2006/relationships" xmlns:p="http://schemas.openxmlformats.org/presentationml/2006/main">
   <p:cSld>
     <p:spTree>
@@ -5801,7 +6390,7 @@
 </p:sld>
 </file>
 
-<file path=ppt/slides/slide4.xml><?xml version="1.0" encoding="utf-8"?>
+<file path=ppt/slides/slide5.xml><?xml version="1.0" encoding="utf-8"?>
 <p:sld xmlns:a="http://schemas.openxmlformats.org/drawingml/2006/main" xmlns:r="http://schemas.openxmlformats.org/officeDocument/2006/relationships" xmlns:p="http://schemas.openxmlformats.org/presentationml/2006/main">
   <p:cSld>
     <p:spTree>
@@ -6986,7 +7575,7 @@
 </p:sld>
 </file>
 
-<file path=ppt/slides/slide5.xml><?xml version="1.0" encoding="utf-8"?>
+<file path=ppt/slides/slide6.xml><?xml version="1.0" encoding="utf-8"?>
 <p:sld xmlns:a="http://schemas.openxmlformats.org/drawingml/2006/main" xmlns:r="http://schemas.openxmlformats.org/officeDocument/2006/relationships" xmlns:p="http://schemas.openxmlformats.org/presentationml/2006/main">
   <p:cSld>
     <p:spTree>
@@ -7331,7 +7920,7 @@
 </p:sld>
 </file>
 
-<file path=ppt/slides/slide6.xml><?xml version="1.0" encoding="utf-8"?>
+<file path=ppt/slides/slide7.xml><?xml version="1.0" encoding="utf-8"?>
 <p:sld xmlns:a="http://schemas.openxmlformats.org/drawingml/2006/main" xmlns:r="http://schemas.openxmlformats.org/officeDocument/2006/relationships" xmlns:p="http://schemas.openxmlformats.org/presentationml/2006/main">
   <p:cSld>
     <p:spTree>
@@ -7927,26 +8516,6 @@
 </file>
 
 <file path=customXml/item1.xml><?xml version="1.0" encoding="utf-8"?>
-<?mso-contentType ?>
-<FormTemplates xmlns="http://schemas.microsoft.com/sharepoint/v3/contenttype/forms">
-  <Display>DocumentLibraryForm</Display>
-  <Edit>DocumentLibraryForm</Edit>
-  <New>DocumentLibraryForm</New>
-</FormTemplates>
-</file>
-
-<file path=customXml/item2.xml><?xml version="1.0" encoding="utf-8"?>
-<p:properties xmlns:p="http://schemas.microsoft.com/office/2006/metadata/properties" xmlns:xsi="http://www.w3.org/2001/XMLSchema-instance" xmlns:pc="http://schemas.microsoft.com/office/infopath/2007/PartnerControls">
-  <documentManagement>
-    <lcf76f155ced4ddcb4097134ff3c332f xmlns="c0caafef-fd22-48d0-85dc-526f5aa604f6">
-      <Terms xmlns="http://schemas.microsoft.com/office/infopath/2007/PartnerControls"/>
-    </lcf76f155ced4ddcb4097134ff3c332f>
-    <TaxCatchAll xmlns="cc7ce8ca-8f52-44ec-9496-3c41d0f5ad18" xsi:nil="true"/>
-  </documentManagement>
-</p:properties>
-</file>
-
-<file path=customXml/item3.xml><?xml version="1.0" encoding="utf-8"?>
 <ct:contentTypeSchema xmlns:ct="http://schemas.microsoft.com/office/2006/metadata/contentType" xmlns:ma="http://schemas.microsoft.com/office/2006/metadata/properties/metaAttributes" ct:_="" ma:_="" ma:contentTypeName="Document" ma:contentTypeID="0x01010072500CC7CC11694381E56D15BD009ABF" ma:contentTypeVersion="17" ma:contentTypeDescription="Create a new document." ma:contentTypeScope="" ma:versionID="5bde0183fae20f930619151b743545d5">
   <xsd:schema xmlns:xsd="http://www.w3.org/2001/XMLSchema" xmlns:xs="http://www.w3.org/2001/XMLSchema" xmlns:p="http://schemas.microsoft.com/office/2006/metadata/properties" xmlns:ns2="c0caafef-fd22-48d0-85dc-526f5aa604f6" xmlns:ns3="cc7ce8ca-8f52-44ec-9496-3c41d0f5ad18" targetNamespace="http://schemas.microsoft.com/office/2006/metadata/properties" ma:root="true" ma:fieldsID="b93acc077f3eeba91a697f445d89f976" ns2:_="" ns3:_="">
     <xsd:import namespace="c0caafef-fd22-48d0-85dc-526f5aa604f6"/>
@@ -8195,10 +8764,41 @@
 </ct:contentTypeSchema>
 </file>
 
+<file path=customXml/item2.xml><?xml version="1.0" encoding="utf-8"?>
+<p:properties xmlns:p="http://schemas.microsoft.com/office/2006/metadata/properties" xmlns:xsi="http://www.w3.org/2001/XMLSchema-instance" xmlns:pc="http://schemas.microsoft.com/office/infopath/2007/PartnerControls">
+  <documentManagement>
+    <lcf76f155ced4ddcb4097134ff3c332f xmlns="c0caafef-fd22-48d0-85dc-526f5aa604f6">
+      <Terms xmlns="http://schemas.microsoft.com/office/infopath/2007/PartnerControls"/>
+    </lcf76f155ced4ddcb4097134ff3c332f>
+    <TaxCatchAll xmlns="cc7ce8ca-8f52-44ec-9496-3c41d0f5ad18" xsi:nil="true"/>
+  </documentManagement>
+</p:properties>
+</file>
+
+<file path=customXml/item3.xml><?xml version="1.0" encoding="utf-8"?>
+<?mso-contentType ?>
+<FormTemplates xmlns="http://schemas.microsoft.com/sharepoint/v3/contenttype/forms">
+  <Display>DocumentLibraryForm</Display>
+  <Edit>DocumentLibraryForm</Edit>
+  <New>DocumentLibraryForm</New>
+</FormTemplates>
+</file>
+
 <file path=customXml/itemProps1.xml><?xml version="1.0" encoding="utf-8"?>
-<ds:datastoreItem xmlns:ds="http://schemas.openxmlformats.org/officeDocument/2006/customXml" ds:itemID="{3A3DF9AB-00FC-46DB-A5D6-293E8DE99346}">
+<ds:datastoreItem xmlns:ds="http://schemas.openxmlformats.org/officeDocument/2006/customXml" ds:itemID="{F8E82391-0565-41E9-9127-B1DFEFCF6557}">
   <ds:schemaRefs>
-    <ds:schemaRef ds:uri="http://schemas.microsoft.com/sharepoint/v3/contenttype/forms"/>
+    <ds:schemaRef ds:uri="http://schemas.microsoft.com/office/2006/metadata/contentType"/>
+    <ds:schemaRef ds:uri="http://schemas.microsoft.com/office/2006/metadata/properties/metaAttributes"/>
+    <ds:schemaRef ds:uri="http://www.w3.org/2001/XMLSchema"/>
+    <ds:schemaRef ds:uri="http://schemas.microsoft.com/office/2006/metadata/properties"/>
+    <ds:schemaRef ds:uri="c0caafef-fd22-48d0-85dc-526f5aa604f6"/>
+    <ds:schemaRef ds:uri="cc7ce8ca-8f52-44ec-9496-3c41d0f5ad18"/>
+    <ds:schemaRef ds:uri="http://schemas.microsoft.com/office/2006/documentManagement/types"/>
+    <ds:schemaRef ds:uri="http://schemas.microsoft.com/office/infopath/2007/PartnerControls"/>
+    <ds:schemaRef ds:uri="http://schemas.openxmlformats.org/package/2006/metadata/core-properties"/>
+    <ds:schemaRef ds:uri="http://purl.org/dc/elements/1.1/"/>
+    <ds:schemaRef ds:uri="http://purl.org/dc/terms/"/>
+    <ds:schemaRef ds:uri="http://schemas.microsoft.com/internal/obd"/>
   </ds:schemaRefs>
 </ds:datastoreItem>
 </file>
@@ -8215,20 +8815,9 @@
 </file>
 
 <file path=customXml/itemProps3.xml><?xml version="1.0" encoding="utf-8"?>
-<ds:datastoreItem xmlns:ds="http://schemas.openxmlformats.org/officeDocument/2006/customXml" ds:itemID="{F8E82391-0565-41E9-9127-B1DFEFCF6557}">
+<ds:datastoreItem xmlns:ds="http://schemas.openxmlformats.org/officeDocument/2006/customXml" ds:itemID="{3A3DF9AB-00FC-46DB-A5D6-293E8DE99346}">
   <ds:schemaRefs>
-    <ds:schemaRef ds:uri="http://schemas.microsoft.com/office/2006/metadata/contentType"/>
-    <ds:schemaRef ds:uri="http://schemas.microsoft.com/office/2006/metadata/properties/metaAttributes"/>
-    <ds:schemaRef ds:uri="http://www.w3.org/2001/XMLSchema"/>
-    <ds:schemaRef ds:uri="http://schemas.microsoft.com/office/2006/metadata/properties"/>
-    <ds:schemaRef ds:uri="c0caafef-fd22-48d0-85dc-526f5aa604f6"/>
-    <ds:schemaRef ds:uri="cc7ce8ca-8f52-44ec-9496-3c41d0f5ad18"/>
-    <ds:schemaRef ds:uri="http://schemas.microsoft.com/office/2006/documentManagement/types"/>
-    <ds:schemaRef ds:uri="http://schemas.microsoft.com/office/infopath/2007/PartnerControls"/>
-    <ds:schemaRef ds:uri="http://schemas.openxmlformats.org/package/2006/metadata/core-properties"/>
-    <ds:schemaRef ds:uri="http://purl.org/dc/elements/1.1/"/>
-    <ds:schemaRef ds:uri="http://purl.org/dc/terms/"/>
-    <ds:schemaRef ds:uri="http://schemas.microsoft.com/internal/obd"/>
+    <ds:schemaRef ds:uri="http://schemas.microsoft.com/sharepoint/v3/contenttype/forms"/>
   </ds:schemaRefs>
 </ds:datastoreItem>
 </file>